--- a/generated/sources/reports/apac/china/中国区9月经营月报_2026_v2.pptx
+++ b/generated/sources/reports/apac/china/中国区9月经营月报_2026_v2.pptx
@@ -387,7 +387,7 @@
               <c:strCache>
                 <c:ptCount val="1"/>
                 <c:pt idx="0">
-                  <c:v>ILVARO 粉色 相关笔记数（小红书）</c:v>
+                  <c:v>IRIDIA 粉色 相关笔记数（小红书）</c:v>
                 </c:pt>
               </c:strCache>
             </c:strRef>
@@ -493,7 +493,7 @@
               <c:strCache>
                 <c:ptCount val="1"/>
                 <c:pt idx="0">
-                  <c:v>POLARIS 相关笔记数</c:v>
+                  <c:v>ASTRA 相关笔记数</c:v>
                 </c:pt>
               </c:strCache>
             </c:strRef>
@@ -3741,7 +3741,7 @@
                 </a:solidFill>
                 <a:latin typeface="Microsoft YaHei"/>
               </a:rPr>
-              <a:t>MONCLER
+              <a:t>VALENTINO
 中国区</a:t>
             </a:r>
           </a:p>
@@ -4081,7 +4081,7 @@
                 </a:solidFill>
                 <a:latin typeface="Microsoft YaHei"/>
               </a:rPr>
-              <a:t>• Genius POLARIS 系列 9月24日上市，首周表现超预期，北京SKP 斗篷款（CAPE）黑色 XXL 已断码。</a:t>
+              <a:t>• Couture ASTRA 系列 9月24日上市，首周表现超预期，北京SKP 斗篷款（CAPE）黑色 XXL 已断码。</a:t>
             </a:r>
           </a:p>
           <a:p>
@@ -4113,7 +4113,7 @@
                 </a:solidFill>
                 <a:latin typeface="Microsoft YaHei"/>
               </a:rPr>
-              <a:t>• 10月初 小红书 上 ILVARO 粉色 话题爆发（LUMIERE 成员 尹夏恩 巴黎时装周同款），门店到货即售罄，大量顾客登记预订。</a:t>
+              <a:t>• 10月初 小红书 上 IRIDIA 粉色 话题爆发（LUMIERE 成员 尹夏恩 巴黎时装周同款），门店到货即售罄，大量顾客登记预订。</a:t>
             </a:r>
           </a:p>
           <a:p>
@@ -6438,7 +6438,7 @@
                 </a:solidFill>
                 <a:latin typeface="Microsoft YaHei"/>
               </a:rPr>
-              <a:t>Genius POLARIS 上市表现</a:t>
+              <a:t>Couture ASTRA 上市表现</a:t>
             </a:r>
           </a:p>
         </p:txBody>
@@ -6702,7 +6702,7 @@
                           </a:solidFill>
                           <a:latin typeface="Microsoft YaHei"/>
                         </a:rPr>
-                        <a:t>Polaris Cape</a:t>
+                        <a:t>Astra Cape</a:t>
                       </a:r>
                     </a:p>
                   </a:txBody>
@@ -6819,7 +6819,7 @@
                           </a:solidFill>
                           <a:latin typeface="Microsoft YaHei"/>
                         </a:rPr>
-                        <a:t>Polaris Cape</a:t>
+                        <a:t>Astra Cape</a:t>
                       </a:r>
                     </a:p>
                   </a:txBody>
@@ -6936,7 +6936,7 @@
                           </a:solidFill>
                           <a:latin typeface="Microsoft YaHei"/>
                         </a:rPr>
-                        <a:t>Polaris Cape</a:t>
+                        <a:t>Astra Cape</a:t>
                       </a:r>
                     </a:p>
                   </a:txBody>
@@ -7053,7 +7053,7 @@
                           </a:solidFill>
                           <a:latin typeface="Microsoft YaHei"/>
                         </a:rPr>
-                        <a:t>Polaris Oversized</a:t>
+                        <a:t>Astra Oversized</a:t>
                       </a:r>
                     </a:p>
                   </a:txBody>
@@ -7170,7 +7170,7 @@
                           </a:solidFill>
                           <a:latin typeface="Microsoft YaHei"/>
                         </a:rPr>
-                        <a:t>Polaris Oversized</a:t>
+                        <a:t>Astra Oversized</a:t>
                       </a:r>
                     </a:p>
                   </a:txBody>
@@ -7287,7 +7287,7 @@
                           </a:solidFill>
                           <a:latin typeface="Microsoft YaHei"/>
                         </a:rPr>
-                        <a:t>Polaris Oversized</a:t>
+                        <a:t>Astra Oversized</a:t>
                       </a:r>
                     </a:p>
                   </a:txBody>
@@ -7404,7 +7404,7 @@
                           </a:solidFill>
                           <a:latin typeface="Microsoft YaHei"/>
                         </a:rPr>
-                        <a:t>Polaris Balaclava</a:t>
+                        <a:t>Astra Balaclava</a:t>
                       </a:r>
                     </a:p>
                   </a:txBody>
@@ -7521,7 +7521,7 @@
                           </a:solidFill>
                           <a:latin typeface="Microsoft YaHei"/>
                         </a:rPr>
-                        <a:t>Polaris Balaclava</a:t>
+                        <a:t>Astra Balaclava</a:t>
                       </a:r>
                     </a:p>
                   </a:txBody>
@@ -7638,7 +7638,7 @@
                           </a:solidFill>
                           <a:latin typeface="Microsoft YaHei"/>
                         </a:rPr>
-                        <a:t>Polaris Balaclava</a:t>
+                        <a:t>Astra Balaclava</a:t>
                       </a:r>
                     </a:p>
                   </a:txBody>
@@ -7811,7 +7811,7 @@
                 </a:solidFill>
                 <a:latin typeface="Microsoft YaHei"/>
               </a:rPr>
-              <a:t>• 建议：申请从欧洲调拨 POLARIS 库存（欧洲销售较弱）。</a:t>
+              <a:t>• 建议：申请从欧洲调拨 ASTRA 库存（欧洲销售较弱）。</a:t>
             </a:r>
           </a:p>
         </p:txBody>
@@ -8023,7 +8023,7 @@
                 </a:solidFill>
                 <a:latin typeface="Microsoft YaHei"/>
               </a:rPr>
-              <a:t>• 10月1日 LUMIERE 成员 尹夏恩（Yoon Ha-eun）在巴黎时装周场外穿着 ILVARO 粉色，10月2日起小红书相关笔记激增，“同款”搜索量排名第一。</a:t>
+              <a:t>• 10月1日 LUMIERE 成员 尹夏恩（Yoon Ha-eun）在巴黎时装周场外穿着 IRIDIA 粉色，10月2日起小红书相关笔记激增，“同款”搜索量排名第一。</a:t>
             </a:r>
           </a:p>
           <a:p>
@@ -8039,7 +8039,7 @@
                 </a:solidFill>
                 <a:latin typeface="Microsoft YaHei"/>
               </a:rPr>
-              <a:t>• 三家门店 ILVARO 粉色 10月2-3日核心尺码全部售罄，10月8日补货当天售完。</a:t>
+              <a:t>• 三家门店 IRIDIA 粉色 10月2-3日核心尺码全部售罄，10月8日补货当天售完。</a:t>
             </a:r>
           </a:p>
           <a:p>
@@ -8055,7 +8055,7 @@
                 </a:solidFill>
                 <a:latin typeface="Microsoft YaHei"/>
               </a:rPr>
-              <a:t>• 黑色、米白色 ILVARO 询问量同步上升。</a:t>
+              <a:t>• 黑色、米白色 IRIDIA 询问量同步上升。</a:t>
             </a:r>
           </a:p>
           <a:p>
@@ -8071,7 +8071,7 @@
                 </a:solidFill>
                 <a:latin typeface="Microsoft YaHei"/>
               </a:rPr>
-              <a:t>• POLARIS 讨论热度平稳，以穿搭分享为主。</a:t>
+              <a:t>• ASTRA 讨论热度平稳，以穿搭分享为主。</a:t>
             </a:r>
           </a:p>
           <a:p>
@@ -8717,7 +8717,7 @@
                 </a:solidFill>
                 <a:latin typeface="Microsoft YaHei"/>
               </a:rPr>
-              <a:t>• ILVARO 粉色无货，登记预订顾客超过百名（三店合计）。</a:t>
+              <a:t>• IRIDIA 粉色无货，登记预订顾客超过百名（三店合计）。</a:t>
             </a:r>
           </a:p>
         </p:txBody>
@@ -8893,7 +8893,7 @@
                 </a:solidFill>
                 <a:latin typeface="Microsoft YaHei"/>
               </a:rPr>
-              <a:t>• ILVARO 粉色：申请紧急追单，优先分配中国区；目前登记顾客名单持续增加。</a:t>
+              <a:t>• IRIDIA 粉色：申请紧急追单，优先分配中国区；目前登记顾客名单持续增加。</a:t>
             </a:r>
           </a:p>
           <a:p>
@@ -8909,7 +8909,7 @@
                 </a:solidFill>
                 <a:latin typeface="Microsoft YaHei"/>
               </a:rPr>
-              <a:t>• POLARIS：申请从欧洲/美国调拨库存。</a:t>
+              <a:t>• ASTRA：申请从欧洲/美国调拨库存。</a:t>
             </a:r>
           </a:p>
           <a:p>
@@ -8925,7 +8925,7 @@
                 </a:solidFill>
                 <a:latin typeface="Microsoft YaHei"/>
               </a:rPr>
-              <a:t>• TIB 马甲 拉链质量问题：北京SKP 已有退货，等待总部质检结论。</a:t>
+              <a:t>• VEL 马甲 拉链质量问题：北京SKP 已有退货，等待总部质检结论。</a:t>
             </a:r>
           </a:p>
           <a:p>
